--- a/m8/diapositivos/sessao-08-m8-f11.pptx
+++ b/m8/diapositivos/sessao-08-m8-f11.pptx
@@ -1956,7 +1956,47 @@
                 <a:ea typeface="Georgia" pitchFamily="34" charset="-122"/>
                 <a:cs typeface="Georgia" pitchFamily="34" charset="-120"/>
               </a:rPr>
-              <a:t>Durante a visita, telemóvel guardado: o caderno e um lápis.</a:t>
+              <a:t>Durante a visita, </a:t>
+            </a:r>
+            <a:pPr indent="0" marL="0">
+              <a:lnSpc>
+                <a:spcPct val="120000"/>
+              </a:lnSpc>
+              <a:spcAft>
+                <a:spcPts val="1000"/>
+              </a:spcAft>
+              <a:buNone/>
+            </a:pPr>
+            <a:r>
+              <a:rPr lang="en-US" sz="2300" b="1" dirty="0">
+                <a:solidFill>
+                  <a:srgbClr val="F2F0EA"/>
+                </a:solidFill>
+                <a:latin typeface="Georgia" pitchFamily="34" charset="0"/>
+                <a:ea typeface="Georgia" pitchFamily="34" charset="-122"/>
+                <a:cs typeface="Georgia" pitchFamily="34" charset="-120"/>
+              </a:rPr>
+              <a:t>telemóvel guardado</a:t>
+            </a:r>
+            <a:pPr indent="0" marL="0">
+              <a:lnSpc>
+                <a:spcPct val="120000"/>
+              </a:lnSpc>
+              <a:spcAft>
+                <a:spcPts val="1000"/>
+              </a:spcAft>
+              <a:buNone/>
+            </a:pPr>
+            <a:r>
+              <a:rPr lang="en-US" sz="2300" dirty="0">
+                <a:solidFill>
+                  <a:srgbClr val="F2F0EA"/>
+                </a:solidFill>
+                <a:latin typeface="Georgia" pitchFamily="34" charset="0"/>
+                <a:ea typeface="Georgia" pitchFamily="34" charset="-122"/>
+                <a:cs typeface="Georgia" pitchFamily="34" charset="-120"/>
+              </a:rPr>
+              <a:t>: o caderno e um lápis.</a:t>
             </a:r>
             <a:endParaRPr lang="en-US" sz="2300" dirty="0"/>
           </a:p>
